--- a/Presentacion_comercial_de_Komite.pptx
+++ b/Presentacion_comercial_de_Komite.pptx
@@ -6195,7 +6195,7 @@
         <p:spPr>
           <a:xfrm>
             <a:off x="9480054" y="8447724"/>
-            <a:ext cx="2729118" cy="352425"/>
+            <a:ext cx="3025332" cy="352425"/>
           </a:xfrm>
           <a:prstGeom prst="rect">
             <a:avLst/>
@@ -6205,7 +6205,7 @@
         </p:spPr>
         <p:txBody>
           <a:bodyPr wrap="square" lIns="0" tIns="0" rIns="0" bIns="0" rtlCol="0" anchor="t">
-            <a:normAutofit fontScale="85000" lnSpcReduction="10000"/>
+            <a:normAutofit fontScale="77500" lnSpcReduction="20000"/>
           </a:bodyPr>
           <a:lstStyle/>
           <a:p>
@@ -6224,7 +6224,7 @@
                 <a:ea typeface="Arial" pitchFamily="34" charset="-122"/>
                 <a:cs typeface="Arial" pitchFamily="34" charset="-120"/>
               </a:rPr>
-              <a:t>vallestelar@gmail.com</a:t>
+              <a:t>contacto.komite@gmail.com</a:t>
             </a:r>
             <a:endParaRPr lang="en-US" sz="2250" dirty="0"/>
           </a:p>
